--- a/exports/pptx/lessons/senior-module-03-ayurveda-good-health/day-05-mid-module.pptx
+++ b/exports/pptx/lessons/senior-module-03-ayurveda-good-health/day-05-mid-module.pptx
@@ -9,9 +9,11 @@
     <p:sldId id="257" r:id="rId3"/>
     <p:sldId id="258" r:id="rId4"/>
     <p:sldId id="259" r:id="rId5"/>
+    <p:sldId id="260" r:id="rId6"/>
+    <p:sldId id="261" r:id="rId7"/>
   </p:sldIdLst>
   <p:notesMasterIdLst>
-    <p:notesMasterId r:id="rId6"/>
+    <p:notesMasterId r:id="rId8"/>
   </p:notesMasterIdLst>
   <p:sldSz cx="9144000" cy="5143500"/>
   <p:notesSz cx="5143500" cy="9144000"/>
@@ -793,6 +795,182 @@
             <a:fld id="{F7021451-1387-4CA6-816F-3879F97B5CBC}" type="slidenum">
               <a:rPr lang="en-US"/>
               <a:t>4</a:t>
+            </a:fld>
+            <a:endParaRPr lang="en-US"/>
+          </a:p>
+        </p:txBody>
+      </p:sp>
+    </p:spTree>
+    <p:extLst>
+      <p:ext uri="{BB962C8B-B14F-4D97-AF65-F5344CB8AC3E}">
+        <p14:creationId xmlns:p14="http://schemas.microsoft.com/office/powerpoint/2010/main" val="1024086991"/>
+      </p:ext>
+    </p:extLst>
+  </p:cSld>
+  <p:clrMapOvr>
+    <a:masterClrMapping/>
+  </p:clrMapOvr>
+</p:notes>
+</file>
+
+<file path=ppt/notesSlides/notesSlide5.xml><?xml version="1.0" encoding="utf-8"?>
+<p:notes xmlns:a="http://schemas.openxmlformats.org/drawingml/2006/main" xmlns:r="http://schemas.openxmlformats.org/officeDocument/2006/relationships" xmlns:p="http://schemas.openxmlformats.org/presentationml/2006/main">
+  <p:cSld>
+    <p:spTree>
+      <p:nvGrpSpPr>
+        <p:cNvPr id="1" name=""/>
+        <p:cNvGrpSpPr/>
+        <p:nvPr/>
+      </p:nvGrpSpPr>
+      <p:grpSpPr>
+        <a:xfrm>
+          <a:off x="0" y="0"/>
+          <a:ext cx="0" cy="0"/>
+          <a:chOff x="0" y="0"/>
+          <a:chExt cx="0" cy="0"/>
+        </a:xfrm>
+      </p:grpSpPr>
+      <p:sp>
+        <p:nvSpPr>
+          <p:cNvPr id="2" name="Slide Image Placeholder 1"/>
+          <p:cNvSpPr>
+            <a:spLocks noGrp="1" noRot="1" noChangeAspect="1"/>
+          </p:cNvSpPr>
+          <p:nvPr>
+            <p:ph type="sldImg"/>
+          </p:nvPr>
+        </p:nvSpPr>
+        <p:spPr/>
+      </p:sp>
+      <p:sp>
+        <p:nvSpPr>
+          <p:cNvPr id="3" name="Notes Placeholder 2"/>
+          <p:cNvSpPr>
+            <a:spLocks noGrp="1"/>
+          </p:cNvSpPr>
+          <p:nvPr>
+            <p:ph type="body" idx="1"/>
+          </p:nvPr>
+        </p:nvSpPr>
+        <p:spPr/>
+        <p:txBody>
+          <a:bodyPr/>
+          <a:lstStyle/>
+          <a:p>
+            <a:r>
+              <a:rPr lang="en-US" dirty="0"/>
+              <a:t/>
+            </a:r>
+            <a:endParaRPr lang="en-US" dirty="0"/>
+          </a:p>
+        </p:txBody>
+      </p:sp>
+      <p:sp>
+        <p:nvSpPr>
+          <p:cNvPr id="4" name="Slide Number Placeholder 3"/>
+          <p:cNvSpPr>
+            <a:spLocks noGrp="1"/>
+          </p:cNvSpPr>
+          <p:nvPr>
+            <p:ph type="sldNum" sz="quarter" idx="10"/>
+          </p:nvPr>
+        </p:nvSpPr>
+        <p:spPr/>
+        <p:txBody>
+          <a:bodyPr/>
+          <a:lstStyle/>
+          <a:p>
+            <a:fld id="{F7021451-1387-4CA6-816F-3879F97B5CBC}" type="slidenum">
+              <a:rPr lang="en-US"/>
+              <a:t>5</a:t>
+            </a:fld>
+            <a:endParaRPr lang="en-US"/>
+          </a:p>
+        </p:txBody>
+      </p:sp>
+    </p:spTree>
+    <p:extLst>
+      <p:ext uri="{BB962C8B-B14F-4D97-AF65-F5344CB8AC3E}">
+        <p14:creationId xmlns:p14="http://schemas.microsoft.com/office/powerpoint/2010/main" val="1024086991"/>
+      </p:ext>
+    </p:extLst>
+  </p:cSld>
+  <p:clrMapOvr>
+    <a:masterClrMapping/>
+  </p:clrMapOvr>
+</p:notes>
+</file>
+
+<file path=ppt/notesSlides/notesSlide6.xml><?xml version="1.0" encoding="utf-8"?>
+<p:notes xmlns:a="http://schemas.openxmlformats.org/drawingml/2006/main" xmlns:r="http://schemas.openxmlformats.org/officeDocument/2006/relationships" xmlns:p="http://schemas.openxmlformats.org/presentationml/2006/main">
+  <p:cSld>
+    <p:spTree>
+      <p:nvGrpSpPr>
+        <p:cNvPr id="1" name=""/>
+        <p:cNvGrpSpPr/>
+        <p:nvPr/>
+      </p:nvGrpSpPr>
+      <p:grpSpPr>
+        <a:xfrm>
+          <a:off x="0" y="0"/>
+          <a:ext cx="0" cy="0"/>
+          <a:chOff x="0" y="0"/>
+          <a:chExt cx="0" cy="0"/>
+        </a:xfrm>
+      </p:grpSpPr>
+      <p:sp>
+        <p:nvSpPr>
+          <p:cNvPr id="2" name="Slide Image Placeholder 1"/>
+          <p:cNvSpPr>
+            <a:spLocks noGrp="1" noRot="1" noChangeAspect="1"/>
+          </p:cNvSpPr>
+          <p:nvPr>
+            <p:ph type="sldImg"/>
+          </p:nvPr>
+        </p:nvSpPr>
+        <p:spPr/>
+      </p:sp>
+      <p:sp>
+        <p:nvSpPr>
+          <p:cNvPr id="3" name="Notes Placeholder 2"/>
+          <p:cNvSpPr>
+            <a:spLocks noGrp="1"/>
+          </p:cNvSpPr>
+          <p:nvPr>
+            <p:ph type="body" idx="1"/>
+          </p:nvPr>
+        </p:nvSpPr>
+        <p:spPr/>
+        <p:txBody>
+          <a:bodyPr/>
+          <a:lstStyle/>
+          <a:p>
+            <a:r>
+              <a:rPr lang="en-US" dirty="0"/>
+              <a:t/>
+            </a:r>
+            <a:endParaRPr lang="en-US" dirty="0"/>
+          </a:p>
+        </p:txBody>
+      </p:sp>
+      <p:sp>
+        <p:nvSpPr>
+          <p:cNvPr id="4" name="Slide Number Placeholder 3"/>
+          <p:cNvSpPr>
+            <a:spLocks noGrp="1"/>
+          </p:cNvSpPr>
+          <p:nvPr>
+            <p:ph type="sldNum" sz="quarter" idx="10"/>
+          </p:nvPr>
+        </p:nvSpPr>
+        <p:spPr/>
+        <p:txBody>
+          <a:bodyPr/>
+          <a:lstStyle/>
+          <a:p>
+            <a:fld id="{F7021451-1387-4CA6-816F-3879F97B5CBC}" type="slidenum">
+              <a:rPr lang="en-US"/>
+              <a:t>6</a:t>
             </a:fld>
             <a:endParaRPr lang="en-US"/>
           </a:p>
@@ -1342,54 +1520,6 @@
         </p:nvSpPr>
         <p:spPr>
           <a:xfrm>
-            <a:off x="406301" y="1223963"/>
-            <a:ext cx="8498026" cy="274290"/>
-          </a:xfrm>
-          <a:prstGeom prst="rect">
-            <a:avLst/>
-          </a:prstGeom>
-          <a:noFill/>
-          <a:ln/>
-        </p:spPr>
-        <p:txBody>
-          <a:bodyPr wrap="square" lIns="0" tIns="0" rIns="0" bIns="0" rtlCol="0" anchor="t"/>
-          <a:lstStyle/>
-          <a:p>
-            <a:pPr algn="l" indent="0" marL="0">
-              <a:lnSpc>
-                <a:spcPts val="2160"/>
-              </a:lnSpc>
-              <a:spcBef>
-                <a:spcPts val="600"/>
-              </a:spcBef>
-              <a:spcAft>
-                <a:spcPts val="800"/>
-              </a:spcAft>
-              <a:buNone/>
-            </a:pPr>
-            <a:r>
-              <a:rPr lang="en-US" sz="1800" b="1" dirty="0">
-                <a:solidFill>
-                  <a:srgbClr val="997929"/>
-                </a:solidFill>
-                <a:latin typeface="Times New Roman" pitchFamily="34" charset="0"/>
-                <a:ea typeface="Times New Roman" pitchFamily="34" charset="-122"/>
-                <a:cs typeface="Times New Roman" pitchFamily="34" charset="-120"/>
-              </a:rPr>
-              <a:t>Flow</a:t>
-            </a:r>
-            <a:endParaRPr lang="en-US" sz="1800" dirty="0"/>
-          </a:p>
-        </p:txBody>
-      </p:sp>
-      <p:sp>
-        <p:nvSpPr>
-          <p:cNvPr id="6" name="Text 4"/>
-          <p:cNvSpPr/>
-          <p:nvPr/>
-        </p:nvSpPr>
-        <p:spPr>
-          <a:xfrm>
             <a:off x="406301" y="4434929"/>
             <a:ext cx="8498026" cy="213271"/>
           </a:xfrm>
@@ -1534,7 +1664,7 @@
                 <a:ea typeface="Times New Roman" pitchFamily="34" charset="-122"/>
                 <a:cs typeface="Times New Roman" pitchFamily="34" charset="-120"/>
               </a:rPr>
-              <a:t>Quiz (20 min)</a:t>
+              <a:t>Flow</a:t>
             </a:r>
             <a:endParaRPr lang="en-US" sz="1800" dirty="0"/>
           </a:p>
@@ -1543,54 +1673,6 @@
       <p:sp>
         <p:nvSpPr>
           <p:cNvPr id="4" name="Text 2"/>
-          <p:cNvSpPr/>
-          <p:nvPr/>
-        </p:nvSpPr>
-        <p:spPr>
-          <a:xfrm>
-            <a:off x="406301" y="870942"/>
-            <a:ext cx="8498026" cy="213271"/>
-          </a:xfrm>
-          <a:prstGeom prst="rect">
-            <a:avLst/>
-          </a:prstGeom>
-          <a:noFill/>
-          <a:ln/>
-        </p:spPr>
-        <p:txBody>
-          <a:bodyPr wrap="square" lIns="0" tIns="0" rIns="0" bIns="0" rtlCol="0" anchor="t"/>
-          <a:lstStyle/>
-          <a:p>
-            <a:pPr algn="l" indent="0" marL="0">
-              <a:lnSpc>
-                <a:spcPts val="1680"/>
-              </a:lnSpc>
-              <a:spcBef>
-                <a:spcPts val="300"/>
-              </a:spcBef>
-              <a:spcAft>
-                <a:spcPts val="300"/>
-              </a:spcAft>
-              <a:buNone/>
-            </a:pPr>
-            <a:r>
-              <a:rPr lang="en-US" sz="1200" dirty="0">
-                <a:solidFill>
-                  <a:srgbClr val="1A1A1A"/>
-                </a:solidFill>
-                <a:latin typeface="Georgia" pitchFamily="34" charset="0"/>
-                <a:ea typeface="Georgia" pitchFamily="34" charset="-122"/>
-                <a:cs typeface="Georgia" pitchFamily="34" charset="-120"/>
-              </a:rPr>
-              <a:t>Formative Part B, 12 marks.</a:t>
-            </a:r>
-            <a:endParaRPr lang="en-US" sz="1200" dirty="0"/>
-          </a:p>
-        </p:txBody>
-      </p:sp>
-      <p:sp>
-        <p:nvSpPr>
-          <p:cNvPr id="5" name="Text 3"/>
           <p:cNvSpPr/>
           <p:nvPr/>
         </p:nvSpPr>
@@ -1740,7 +1822,7 @@
                 <a:ea typeface="Times New Roman" pitchFamily="34" charset="-122"/>
                 <a:cs typeface="Times New Roman" pitchFamily="34" charset="-120"/>
               </a:rPr>
-              <a:t>Topic commitment (20 min)</a:t>
+              <a:t>Quiz (20 min)</a:t>
             </a:r>
             <a:endParaRPr lang="en-US" sz="1800" dirty="0"/>
           </a:p>
@@ -1755,7 +1837,7 @@
         <p:spPr>
           <a:xfrm>
             <a:off x="406301" y="870942"/>
-            <a:ext cx="8498026" cy="426541"/>
+            <a:ext cx="8498026" cy="213271"/>
           </a:xfrm>
           <a:prstGeom prst="rect">
             <a:avLst/>
@@ -1788,7 +1870,7 @@
                 <a:ea typeface="Georgia" pitchFamily="34" charset="-122"/>
                 <a:cs typeface="Georgia" pitchFamily="34" charset="-120"/>
               </a:rPr>
-              <a:t>Each student writes: – Working title – One-paragraph thesis (specific Ayurvedic claim being examined) – 3 sources: ≥1 classical primary, ≥1 modern empirical, ≥1 historical/scholarly</a:t>
+              <a:t>Formative Part B, 12 marks.</a:t>
             </a:r>
             <a:endParaRPr lang="en-US" sz="1200" dirty="0"/>
           </a:p>
@@ -1797,196 +1879,6 @@
       <p:sp>
         <p:nvSpPr>
           <p:cNvPr id="5" name="Text 3"/>
-          <p:cNvSpPr/>
-          <p:nvPr/>
-        </p:nvSpPr>
-        <p:spPr>
-          <a:xfrm>
-            <a:off x="406301" y="1373684"/>
-            <a:ext cx="8498026" cy="213271"/>
-          </a:xfrm>
-          <a:prstGeom prst="rect">
-            <a:avLst/>
-          </a:prstGeom>
-          <a:noFill/>
-          <a:ln/>
-        </p:spPr>
-        <p:txBody>
-          <a:bodyPr wrap="square" lIns="0" tIns="0" rIns="0" bIns="0" rtlCol="0" anchor="t"/>
-          <a:lstStyle/>
-          <a:p>
-            <a:pPr algn="l" indent="0" marL="0">
-              <a:lnSpc>
-                <a:spcPts val="1680"/>
-              </a:lnSpc>
-              <a:spcBef>
-                <a:spcPts val="300"/>
-              </a:spcBef>
-              <a:spcAft>
-                <a:spcPts val="300"/>
-              </a:spcAft>
-              <a:buNone/>
-            </a:pPr>
-            <a:r>
-              <a:rPr lang="en-US" sz="1200" dirty="0">
-                <a:solidFill>
-                  <a:srgbClr val="1A1A1A"/>
-                </a:solidFill>
-                <a:latin typeface="Georgia" pitchFamily="34" charset="0"/>
-                <a:ea typeface="Georgia" pitchFamily="34" charset="-122"/>
-                <a:cs typeface="Georgia" pitchFamily="34" charset="-120"/>
-              </a:rPr>
-              <a:t>Suggested topics:</a:t>
-            </a:r>
-            <a:endParaRPr lang="en-US" sz="1200" dirty="0"/>
-          </a:p>
-        </p:txBody>
-      </p:sp>
-      <p:sp>
-        <p:nvSpPr>
-          <p:cNvPr id="6" name="Text 4"/>
-          <p:cNvSpPr/>
-          <p:nvPr/>
-        </p:nvSpPr>
-        <p:spPr>
-          <a:xfrm>
-            <a:off x="634901" y="1675805"/>
-            <a:ext cx="8102798" cy="1257002"/>
-          </a:xfrm>
-          <a:prstGeom prst="rect">
-            <a:avLst/>
-          </a:prstGeom>
-          <a:noFill/>
-          <a:ln/>
-        </p:spPr>
-        <p:txBody>
-          <a:bodyPr wrap="square" lIns="0" tIns="0" rIns="0" bIns="0" rtlCol="0" anchor="t"/>
-          <a:lstStyle/>
-          <a:p>
-            <a:pPr algn="l" marL="342900" indent="-342900">
-              <a:lnSpc>
-                <a:spcPts val="1620"/>
-              </a:lnSpc>
-              <a:spcAft>
-                <a:spcPts val="300"/>
-              </a:spcAft>
-              <a:buSzPct val="100000"/>
-              <a:buChar char="•"/>
-            </a:pPr>
-            <a:r>
-              <a:rPr lang="en-US" sz="1200" dirty="0">
-                <a:solidFill>
-                  <a:srgbClr val="1A1A1A"/>
-                </a:solidFill>
-                <a:latin typeface="Georgia" pitchFamily="34" charset="0"/>
-                <a:ea typeface="Georgia" pitchFamily="34" charset="-122"/>
-                <a:cs typeface="Georgia" pitchFamily="34" charset="-120"/>
-              </a:rPr>
-              <a:t>"Curcumin's anti-inflammatory action — what does the modern evidence say?"</a:t>
-            </a:r>
-            <a:endParaRPr lang="en-US" sz="1200" dirty="0"/>
-          </a:p>
-          <a:p>
-            <a:pPr algn="l" marL="342900" indent="-342900">
-              <a:lnSpc>
-                <a:spcPts val="1620"/>
-              </a:lnSpc>
-              <a:spcAft>
-                <a:spcPts val="300"/>
-              </a:spcAft>
-              <a:buSzPct val="100000"/>
-              <a:buChar char="•"/>
-            </a:pPr>
-            <a:r>
-              <a:rPr lang="en-US" sz="1200" dirty="0">
-                <a:solidFill>
-                  <a:srgbClr val="1A1A1A"/>
-                </a:solidFill>
-                <a:latin typeface="Georgia" pitchFamily="34" charset="0"/>
-                <a:ea typeface="Georgia" pitchFamily="34" charset="-122"/>
-                <a:cs typeface="Georgia" pitchFamily="34" charset="-120"/>
-              </a:rPr>
-              <a:t>"The Tridosha typology: clinical heuristic or biomedical classification?"</a:t>
-            </a:r>
-            <a:endParaRPr lang="en-US" sz="1200" dirty="0"/>
-          </a:p>
-          <a:p>
-            <a:pPr algn="l" marL="342900" indent="-342900">
-              <a:lnSpc>
-                <a:spcPts val="1620"/>
-              </a:lnSpc>
-              <a:spcAft>
-                <a:spcPts val="300"/>
-              </a:spcAft>
-              <a:buSzPct val="100000"/>
-              <a:buChar char="•"/>
-            </a:pPr>
-            <a:r>
-              <a:rPr lang="en-US" sz="1200" dirty="0">
-                <a:solidFill>
-                  <a:srgbClr val="1A1A1A"/>
-                </a:solidFill>
-                <a:latin typeface="Georgia" pitchFamily="34" charset="0"/>
-                <a:ea typeface="Georgia" pitchFamily="34" charset="-122"/>
-                <a:cs typeface="Georgia" pitchFamily="34" charset="-120"/>
-              </a:rPr>
-              <a:t>"Dinacharya and circadian biology — convergent or coincidental?"</a:t>
-            </a:r>
-            <a:endParaRPr lang="en-US" sz="1200" dirty="0"/>
-          </a:p>
-          <a:p>
-            <a:pPr algn="l" marL="342900" indent="-342900">
-              <a:lnSpc>
-                <a:spcPts val="1620"/>
-              </a:lnSpc>
-              <a:spcAft>
-                <a:spcPts val="300"/>
-              </a:spcAft>
-              <a:buSzPct val="100000"/>
-              <a:buChar char="•"/>
-            </a:pPr>
-            <a:r>
-              <a:rPr lang="en-US" sz="1200" dirty="0">
-                <a:solidFill>
-                  <a:srgbClr val="1A1A1A"/>
-                </a:solidFill>
-                <a:latin typeface="Georgia" pitchFamily="34" charset="0"/>
-                <a:ea typeface="Georgia" pitchFamily="34" charset="-122"/>
-                <a:cs typeface="Georgia" pitchFamily="34" charset="-120"/>
-              </a:rPr>
-              <a:t>"Should AYUSH practitioners be allowed to prescribe biomedical drugs?"</a:t>
-            </a:r>
-            <a:endParaRPr lang="en-US" sz="1200" dirty="0"/>
-          </a:p>
-          <a:p>
-            <a:pPr algn="l" marL="342900" indent="-342900">
-              <a:lnSpc>
-                <a:spcPts val="1620"/>
-              </a:lnSpc>
-              <a:spcAft>
-                <a:spcPts val="300"/>
-              </a:spcAft>
-              <a:buSzPct val="100000"/>
-              <a:buChar char="•"/>
-            </a:pPr>
-            <a:r>
-              <a:rPr lang="en-US" sz="1200" dirty="0">
-                <a:solidFill>
-                  <a:srgbClr val="1A1A1A"/>
-                </a:solidFill>
-                <a:latin typeface="Georgia" pitchFamily="34" charset="0"/>
-                <a:ea typeface="Georgia" pitchFamily="34" charset="-122"/>
-                <a:cs typeface="Georgia" pitchFamily="34" charset="-120"/>
-              </a:rPr>
-              <a:t>"Sushruta's surgical legacy — what specifically did European surgeons learn?"</a:t>
-            </a:r>
-            <a:endParaRPr lang="en-US" sz="1200" dirty="0"/>
-          </a:p>
-        </p:txBody>
-      </p:sp>
-      <p:sp>
-        <p:nvSpPr>
-          <p:cNvPr id="7" name="Text 5"/>
           <p:cNvSpPr/>
           <p:nvPr/>
         </p:nvSpPr>
@@ -2136,7 +2028,7 @@
                 <a:ea typeface="Times New Roman" pitchFamily="34" charset="-122"/>
                 <a:cs typeface="Times New Roman" pitchFamily="34" charset="-120"/>
               </a:rPr>
-              <a:t>Wrap-up (5 min)</a:t>
+              <a:t>Topic commitment (20 min)</a:t>
             </a:r>
             <a:endParaRPr lang="en-US" sz="1800" dirty="0"/>
           </a:p>
@@ -2184,7 +2076,653 @@
                 <a:ea typeface="Georgia" pitchFamily="34" charset="-122"/>
                 <a:cs typeface="Georgia" pitchFamily="34" charset="-120"/>
               </a:rPr>
-              <a:t>– Topic + thesis submitted at door.</a:t>
+              <a:t>Each student writes:</a:t>
+            </a:r>
+            <a:endParaRPr lang="en-US" sz="1200" dirty="0"/>
+          </a:p>
+        </p:txBody>
+      </p:sp>
+      <p:sp>
+        <p:nvSpPr>
+          <p:cNvPr id="5" name="Text 3"/>
+          <p:cNvSpPr/>
+          <p:nvPr/>
+        </p:nvSpPr>
+        <p:spPr>
+          <a:xfrm>
+            <a:off x="634901" y="1173063"/>
+            <a:ext cx="8102798" cy="769441"/>
+          </a:xfrm>
+          <a:prstGeom prst="rect">
+            <a:avLst/>
+          </a:prstGeom>
+          <a:noFill/>
+          <a:ln/>
+        </p:spPr>
+        <p:txBody>
+          <a:bodyPr wrap="square" lIns="0" tIns="0" rIns="0" bIns="0" rtlCol="0" anchor="t"/>
+          <a:lstStyle/>
+          <a:p>
+            <a:pPr algn="l" marL="342900" indent="-342900">
+              <a:lnSpc>
+                <a:spcPts val="1620"/>
+              </a:lnSpc>
+              <a:spcAft>
+                <a:spcPts val="300"/>
+              </a:spcAft>
+              <a:buSzPct val="100000"/>
+              <a:buChar char="•"/>
+            </a:pPr>
+            <a:r>
+              <a:rPr lang="en-US" sz="1200" dirty="0">
+                <a:solidFill>
+                  <a:srgbClr val="1A1A1A"/>
+                </a:solidFill>
+                <a:latin typeface="Georgia" pitchFamily="34" charset="0"/>
+                <a:ea typeface="Georgia" pitchFamily="34" charset="-122"/>
+                <a:cs typeface="Georgia" pitchFamily="34" charset="-120"/>
+              </a:rPr>
+              <a:t>Working title</a:t>
+            </a:r>
+            <a:endParaRPr lang="en-US" sz="1200" dirty="0"/>
+          </a:p>
+          <a:p>
+            <a:pPr algn="l" marL="342900" indent="-342900">
+              <a:lnSpc>
+                <a:spcPts val="1620"/>
+              </a:lnSpc>
+              <a:spcAft>
+                <a:spcPts val="300"/>
+              </a:spcAft>
+              <a:buSzPct val="100000"/>
+              <a:buChar char="•"/>
+            </a:pPr>
+            <a:r>
+              <a:rPr lang="en-US" sz="1200" dirty="0">
+                <a:solidFill>
+                  <a:srgbClr val="1A1A1A"/>
+                </a:solidFill>
+                <a:latin typeface="Georgia" pitchFamily="34" charset="0"/>
+                <a:ea typeface="Georgia" pitchFamily="34" charset="-122"/>
+                <a:cs typeface="Georgia" pitchFamily="34" charset="-120"/>
+              </a:rPr>
+              <a:t>One-paragraph thesis (specific Ayurvedic claim being examined)</a:t>
+            </a:r>
+            <a:endParaRPr lang="en-US" sz="1200" dirty="0"/>
+          </a:p>
+          <a:p>
+            <a:pPr algn="l" marL="342900" indent="-342900">
+              <a:lnSpc>
+                <a:spcPts val="1620"/>
+              </a:lnSpc>
+              <a:spcAft>
+                <a:spcPts val="300"/>
+              </a:spcAft>
+              <a:buSzPct val="100000"/>
+              <a:buChar char="•"/>
+            </a:pPr>
+            <a:r>
+              <a:rPr lang="en-US" sz="1200" dirty="0">
+                <a:solidFill>
+                  <a:srgbClr val="1A1A1A"/>
+                </a:solidFill>
+                <a:latin typeface="Georgia" pitchFamily="34" charset="0"/>
+                <a:ea typeface="Georgia" pitchFamily="34" charset="-122"/>
+                <a:cs typeface="Georgia" pitchFamily="34" charset="-120"/>
+              </a:rPr>
+              <a:t>3 sources: ≥1 classical primary, ≥1 modern empirical, ≥1 historical/scholarly</a:t>
+            </a:r>
+            <a:endParaRPr lang="en-US" sz="1200" dirty="0"/>
+          </a:p>
+        </p:txBody>
+      </p:sp>
+      <p:sp>
+        <p:nvSpPr>
+          <p:cNvPr id="6" name="Text 4"/>
+          <p:cNvSpPr/>
+          <p:nvPr/>
+        </p:nvSpPr>
+        <p:spPr>
+          <a:xfrm>
+            <a:off x="406301" y="4434929"/>
+            <a:ext cx="8498026" cy="213271"/>
+          </a:xfrm>
+          <a:prstGeom prst="rect">
+            <a:avLst/>
+          </a:prstGeom>
+          <a:noFill/>
+          <a:ln/>
+        </p:spPr>
+        <p:txBody>
+          <a:bodyPr wrap="square" lIns="0" tIns="0" rIns="0" bIns="0" rtlCol="0" anchor="t"/>
+          <a:lstStyle/>
+          <a:p>
+            <a:pPr algn="l" indent="0" marL="0">
+              <a:lnSpc>
+                <a:spcPts val="1680"/>
+              </a:lnSpc>
+              <a:spcBef>
+                <a:spcPts val="300"/>
+              </a:spcBef>
+              <a:spcAft>
+                <a:spcPts val="300"/>
+              </a:spcAft>
+              <a:buNone/>
+            </a:pPr>
+            <a:r>
+              <a:rPr lang="en-US" sz="1200" dirty="0">
+                <a:solidFill>
+                  <a:srgbClr val="1A1A1A"/>
+                </a:solidFill>
+                <a:latin typeface="Georgia" pitchFamily="34" charset="0"/>
+                <a:ea typeface="Georgia" pitchFamily="34" charset="-122"/>
+                <a:cs typeface="Georgia" pitchFamily="34" charset="-120"/>
+              </a:rPr>
+              <a:t>Senior ·  · IKS Curriculum</a:t>
+            </a:r>
+            <a:endParaRPr lang="en-US" sz="1200" dirty="0"/>
+          </a:p>
+        </p:txBody>
+      </p:sp>
+    </p:spTree>
+  </p:cSld>
+  <p:clrMapOvr>
+    <a:masterClrMapping/>
+  </p:clrMapOvr>
+</p:sld>
+</file>
+
+<file path=ppt/slides/slide5.xml><?xml version="1.0" encoding="utf-8"?>
+<p:sld xmlns:a="http://schemas.openxmlformats.org/drawingml/2006/main" xmlns:r="http://schemas.openxmlformats.org/officeDocument/2006/relationships" xmlns:p="http://schemas.openxmlformats.org/presentationml/2006/main">
+  <p:cSld name="Slide 5">
+    <p:bg>
+      <p:bgPr>
+        <a:solidFill>
+          <a:srgbClr val="FAF7F2"/>
+        </a:solidFill>
+      </p:bgPr>
+    </p:bg>
+    <p:spTree>
+      <p:nvGrpSpPr>
+        <p:cNvPr id="1" name=""/>
+        <p:cNvGrpSpPr/>
+        <p:nvPr/>
+      </p:nvGrpSpPr>
+      <p:grpSpPr>
+        <a:xfrm>
+          <a:off x="0" y="0"/>
+          <a:ext cx="0" cy="0"/>
+          <a:chOff x="0" y="0"/>
+          <a:chExt cx="0" cy="0"/>
+        </a:xfrm>
+      </p:grpSpPr>
+      <p:sp>
+        <p:nvSpPr>
+          <p:cNvPr id="2" name="Text 0"/>
+          <p:cNvSpPr/>
+          <p:nvPr/>
+        </p:nvSpPr>
+        <p:spPr>
+          <a:xfrm>
+            <a:off x="0" y="0"/>
+            <a:ext cx="9144000" cy="101501"/>
+          </a:xfrm>
+          <a:prstGeom prst="rect">
+            <a:avLst/>
+          </a:prstGeom>
+          <a:solidFill>
+            <a:srgbClr val="5D1D2E"/>
+          </a:solidFill>
+          <a:ln/>
+        </p:spPr>
+        <p:txBody>
+          <a:bodyPr wrap="square" rtlCol="0" anchor="ctr"/>
+          <a:lstStyle/>
+          <a:p>
+            <a:pPr indent="0" marL="0">
+              <a:buNone/>
+            </a:pPr>
+            <a:endParaRPr lang="en-US" dirty="0"/>
+          </a:p>
+        </p:txBody>
+      </p:sp>
+      <p:sp>
+        <p:nvSpPr>
+          <p:cNvPr id="3" name="Text 1"/>
+          <p:cNvSpPr/>
+          <p:nvPr/>
+        </p:nvSpPr>
+        <p:spPr>
+          <a:xfrm>
+            <a:off x="406301" y="457051"/>
+            <a:ext cx="8498026" cy="274290"/>
+          </a:xfrm>
+          <a:prstGeom prst="rect">
+            <a:avLst/>
+          </a:prstGeom>
+          <a:noFill/>
+          <a:ln/>
+        </p:spPr>
+        <p:txBody>
+          <a:bodyPr wrap="square" lIns="0" tIns="0" rIns="0" bIns="0" rtlCol="0" anchor="t"/>
+          <a:lstStyle/>
+          <a:p>
+            <a:pPr algn="l" indent="0" marL="0">
+              <a:lnSpc>
+                <a:spcPts val="2160"/>
+              </a:lnSpc>
+              <a:spcBef>
+                <a:spcPts val="600"/>
+              </a:spcBef>
+              <a:spcAft>
+                <a:spcPts val="800"/>
+              </a:spcAft>
+              <a:buNone/>
+            </a:pPr>
+            <a:r>
+              <a:rPr lang="en-US" sz="1800" b="1" dirty="0">
+                <a:solidFill>
+                  <a:srgbClr val="997929"/>
+                </a:solidFill>
+                <a:latin typeface="Times New Roman" pitchFamily="34" charset="0"/>
+                <a:ea typeface="Times New Roman" pitchFamily="34" charset="-122"/>
+                <a:cs typeface="Times New Roman" pitchFamily="34" charset="-120"/>
+              </a:rPr>
+              <a:t>Topic commitment (20 min) (cont.)</a:t>
+            </a:r>
+            <a:endParaRPr lang="en-US" sz="1800" dirty="0"/>
+          </a:p>
+        </p:txBody>
+      </p:sp>
+      <p:sp>
+        <p:nvSpPr>
+          <p:cNvPr id="4" name="Text 2"/>
+          <p:cNvSpPr/>
+          <p:nvPr/>
+        </p:nvSpPr>
+        <p:spPr>
+          <a:xfrm>
+            <a:off x="406301" y="870942"/>
+            <a:ext cx="8498026" cy="213271"/>
+          </a:xfrm>
+          <a:prstGeom prst="rect">
+            <a:avLst/>
+          </a:prstGeom>
+          <a:noFill/>
+          <a:ln/>
+        </p:spPr>
+        <p:txBody>
+          <a:bodyPr wrap="square" lIns="0" tIns="0" rIns="0" bIns="0" rtlCol="0" anchor="t"/>
+          <a:lstStyle/>
+          <a:p>
+            <a:pPr algn="l" indent="0" marL="0">
+              <a:lnSpc>
+                <a:spcPts val="1680"/>
+              </a:lnSpc>
+              <a:spcBef>
+                <a:spcPts val="300"/>
+              </a:spcBef>
+              <a:spcAft>
+                <a:spcPts val="300"/>
+              </a:spcAft>
+              <a:buNone/>
+            </a:pPr>
+            <a:r>
+              <a:rPr lang="en-US" sz="1200" dirty="0">
+                <a:solidFill>
+                  <a:srgbClr val="1A1A1A"/>
+                </a:solidFill>
+                <a:latin typeface="Georgia" pitchFamily="34" charset="0"/>
+                <a:ea typeface="Georgia" pitchFamily="34" charset="-122"/>
+                <a:cs typeface="Georgia" pitchFamily="34" charset="-120"/>
+              </a:rPr>
+              <a:t>Suggested topics:</a:t>
+            </a:r>
+            <a:endParaRPr lang="en-US" sz="1200" dirty="0"/>
+          </a:p>
+        </p:txBody>
+      </p:sp>
+      <p:sp>
+        <p:nvSpPr>
+          <p:cNvPr id="5" name="Text 3"/>
+          <p:cNvSpPr/>
+          <p:nvPr/>
+        </p:nvSpPr>
+        <p:spPr>
+          <a:xfrm>
+            <a:off x="634901" y="1173063"/>
+            <a:ext cx="8102798" cy="1257002"/>
+          </a:xfrm>
+          <a:prstGeom prst="rect">
+            <a:avLst/>
+          </a:prstGeom>
+          <a:noFill/>
+          <a:ln/>
+        </p:spPr>
+        <p:txBody>
+          <a:bodyPr wrap="square" lIns="0" tIns="0" rIns="0" bIns="0" rtlCol="0" anchor="t"/>
+          <a:lstStyle/>
+          <a:p>
+            <a:pPr algn="l" marL="342900" indent="-342900">
+              <a:lnSpc>
+                <a:spcPts val="1620"/>
+              </a:lnSpc>
+              <a:spcAft>
+                <a:spcPts val="300"/>
+              </a:spcAft>
+              <a:buSzPct val="100000"/>
+              <a:buChar char="•"/>
+            </a:pPr>
+            <a:r>
+              <a:rPr lang="en-US" sz="1200" dirty="0">
+                <a:solidFill>
+                  <a:srgbClr val="1A1A1A"/>
+                </a:solidFill>
+                <a:latin typeface="Georgia" pitchFamily="34" charset="0"/>
+                <a:ea typeface="Georgia" pitchFamily="34" charset="-122"/>
+                <a:cs typeface="Georgia" pitchFamily="34" charset="-120"/>
+              </a:rPr>
+              <a:t>"Curcumin's anti-inflammatory action — what does the modern evidence say?"</a:t>
+            </a:r>
+            <a:endParaRPr lang="en-US" sz="1200" dirty="0"/>
+          </a:p>
+          <a:p>
+            <a:pPr algn="l" marL="342900" indent="-342900">
+              <a:lnSpc>
+                <a:spcPts val="1620"/>
+              </a:lnSpc>
+              <a:spcAft>
+                <a:spcPts val="300"/>
+              </a:spcAft>
+              <a:buSzPct val="100000"/>
+              <a:buChar char="•"/>
+            </a:pPr>
+            <a:r>
+              <a:rPr lang="en-US" sz="1200" dirty="0">
+                <a:solidFill>
+                  <a:srgbClr val="1A1A1A"/>
+                </a:solidFill>
+                <a:latin typeface="Georgia" pitchFamily="34" charset="0"/>
+                <a:ea typeface="Georgia" pitchFamily="34" charset="-122"/>
+                <a:cs typeface="Georgia" pitchFamily="34" charset="-120"/>
+              </a:rPr>
+              <a:t>"The Tridosha typology: clinical heuristic or biomedical classification?"</a:t>
+            </a:r>
+            <a:endParaRPr lang="en-US" sz="1200" dirty="0"/>
+          </a:p>
+          <a:p>
+            <a:pPr algn="l" marL="342900" indent="-342900">
+              <a:lnSpc>
+                <a:spcPts val="1620"/>
+              </a:lnSpc>
+              <a:spcAft>
+                <a:spcPts val="300"/>
+              </a:spcAft>
+              <a:buSzPct val="100000"/>
+              <a:buChar char="•"/>
+            </a:pPr>
+            <a:r>
+              <a:rPr lang="en-US" sz="1200" dirty="0">
+                <a:solidFill>
+                  <a:srgbClr val="1A1A1A"/>
+                </a:solidFill>
+                <a:latin typeface="Georgia" pitchFamily="34" charset="0"/>
+                <a:ea typeface="Georgia" pitchFamily="34" charset="-122"/>
+                <a:cs typeface="Georgia" pitchFamily="34" charset="-120"/>
+              </a:rPr>
+              <a:t>"Dinacharya and circadian biology — convergent or coincidental?"</a:t>
+            </a:r>
+            <a:endParaRPr lang="en-US" sz="1200" dirty="0"/>
+          </a:p>
+          <a:p>
+            <a:pPr algn="l" marL="342900" indent="-342900">
+              <a:lnSpc>
+                <a:spcPts val="1620"/>
+              </a:lnSpc>
+              <a:spcAft>
+                <a:spcPts val="300"/>
+              </a:spcAft>
+              <a:buSzPct val="100000"/>
+              <a:buChar char="•"/>
+            </a:pPr>
+            <a:r>
+              <a:rPr lang="en-US" sz="1200" dirty="0">
+                <a:solidFill>
+                  <a:srgbClr val="1A1A1A"/>
+                </a:solidFill>
+                <a:latin typeface="Georgia" pitchFamily="34" charset="0"/>
+                <a:ea typeface="Georgia" pitchFamily="34" charset="-122"/>
+                <a:cs typeface="Georgia" pitchFamily="34" charset="-120"/>
+              </a:rPr>
+              <a:t>"Should AYUSH practitioners be allowed to prescribe biomedical drugs?"</a:t>
+            </a:r>
+            <a:endParaRPr lang="en-US" sz="1200" dirty="0"/>
+          </a:p>
+          <a:p>
+            <a:pPr algn="l" marL="342900" indent="-342900">
+              <a:lnSpc>
+                <a:spcPts val="1620"/>
+              </a:lnSpc>
+              <a:spcAft>
+                <a:spcPts val="300"/>
+              </a:spcAft>
+              <a:buSzPct val="100000"/>
+              <a:buChar char="•"/>
+            </a:pPr>
+            <a:r>
+              <a:rPr lang="en-US" sz="1200" dirty="0">
+                <a:solidFill>
+                  <a:srgbClr val="1A1A1A"/>
+                </a:solidFill>
+                <a:latin typeface="Georgia" pitchFamily="34" charset="0"/>
+                <a:ea typeface="Georgia" pitchFamily="34" charset="-122"/>
+                <a:cs typeface="Georgia" pitchFamily="34" charset="-120"/>
+              </a:rPr>
+              <a:t>"Sushruta's surgical legacy — what specifically did European surgeons learn?"</a:t>
+            </a:r>
+            <a:endParaRPr lang="en-US" sz="1200" dirty="0"/>
+          </a:p>
+        </p:txBody>
+      </p:sp>
+      <p:sp>
+        <p:nvSpPr>
+          <p:cNvPr id="6" name="Text 4"/>
+          <p:cNvSpPr/>
+          <p:nvPr/>
+        </p:nvSpPr>
+        <p:spPr>
+          <a:xfrm>
+            <a:off x="406301" y="4434929"/>
+            <a:ext cx="8498026" cy="213271"/>
+          </a:xfrm>
+          <a:prstGeom prst="rect">
+            <a:avLst/>
+          </a:prstGeom>
+          <a:noFill/>
+          <a:ln/>
+        </p:spPr>
+        <p:txBody>
+          <a:bodyPr wrap="square" lIns="0" tIns="0" rIns="0" bIns="0" rtlCol="0" anchor="t"/>
+          <a:lstStyle/>
+          <a:p>
+            <a:pPr algn="l" indent="0" marL="0">
+              <a:lnSpc>
+                <a:spcPts val="1680"/>
+              </a:lnSpc>
+              <a:spcBef>
+                <a:spcPts val="300"/>
+              </a:spcBef>
+              <a:spcAft>
+                <a:spcPts val="300"/>
+              </a:spcAft>
+              <a:buNone/>
+            </a:pPr>
+            <a:r>
+              <a:rPr lang="en-US" sz="1200" dirty="0">
+                <a:solidFill>
+                  <a:srgbClr val="1A1A1A"/>
+                </a:solidFill>
+                <a:latin typeface="Georgia" pitchFamily="34" charset="0"/>
+                <a:ea typeface="Georgia" pitchFamily="34" charset="-122"/>
+                <a:cs typeface="Georgia" pitchFamily="34" charset="-120"/>
+              </a:rPr>
+              <a:t>Senior ·  · IKS Curriculum</a:t>
+            </a:r>
+            <a:endParaRPr lang="en-US" sz="1200" dirty="0"/>
+          </a:p>
+        </p:txBody>
+      </p:sp>
+    </p:spTree>
+  </p:cSld>
+  <p:clrMapOvr>
+    <a:masterClrMapping/>
+  </p:clrMapOvr>
+</p:sld>
+</file>
+
+<file path=ppt/slides/slide6.xml><?xml version="1.0" encoding="utf-8"?>
+<p:sld xmlns:a="http://schemas.openxmlformats.org/drawingml/2006/main" xmlns:r="http://schemas.openxmlformats.org/officeDocument/2006/relationships" xmlns:p="http://schemas.openxmlformats.org/presentationml/2006/main">
+  <p:cSld name="Slide 6">
+    <p:bg>
+      <p:bgPr>
+        <a:solidFill>
+          <a:srgbClr val="FAF7F2"/>
+        </a:solidFill>
+      </p:bgPr>
+    </p:bg>
+    <p:spTree>
+      <p:nvGrpSpPr>
+        <p:cNvPr id="1" name=""/>
+        <p:cNvGrpSpPr/>
+        <p:nvPr/>
+      </p:nvGrpSpPr>
+      <p:grpSpPr>
+        <a:xfrm>
+          <a:off x="0" y="0"/>
+          <a:ext cx="0" cy="0"/>
+          <a:chOff x="0" y="0"/>
+          <a:chExt cx="0" cy="0"/>
+        </a:xfrm>
+      </p:grpSpPr>
+      <p:sp>
+        <p:nvSpPr>
+          <p:cNvPr id="2" name="Text 0"/>
+          <p:cNvSpPr/>
+          <p:nvPr/>
+        </p:nvSpPr>
+        <p:spPr>
+          <a:xfrm>
+            <a:off x="0" y="0"/>
+            <a:ext cx="9144000" cy="101501"/>
+          </a:xfrm>
+          <a:prstGeom prst="rect">
+            <a:avLst/>
+          </a:prstGeom>
+          <a:solidFill>
+            <a:srgbClr val="5D1D2E"/>
+          </a:solidFill>
+          <a:ln/>
+        </p:spPr>
+        <p:txBody>
+          <a:bodyPr wrap="square" rtlCol="0" anchor="ctr"/>
+          <a:lstStyle/>
+          <a:p>
+            <a:pPr indent="0" marL="0">
+              <a:buNone/>
+            </a:pPr>
+            <a:endParaRPr lang="en-US" dirty="0"/>
+          </a:p>
+        </p:txBody>
+      </p:sp>
+      <p:sp>
+        <p:nvSpPr>
+          <p:cNvPr id="3" name="Text 1"/>
+          <p:cNvSpPr/>
+          <p:nvPr/>
+        </p:nvSpPr>
+        <p:spPr>
+          <a:xfrm>
+            <a:off x="406301" y="457051"/>
+            <a:ext cx="8498026" cy="274290"/>
+          </a:xfrm>
+          <a:prstGeom prst="rect">
+            <a:avLst/>
+          </a:prstGeom>
+          <a:noFill/>
+          <a:ln/>
+        </p:spPr>
+        <p:txBody>
+          <a:bodyPr wrap="square" lIns="0" tIns="0" rIns="0" bIns="0" rtlCol="0" anchor="t"/>
+          <a:lstStyle/>
+          <a:p>
+            <a:pPr algn="l" indent="0" marL="0">
+              <a:lnSpc>
+                <a:spcPts val="2160"/>
+              </a:lnSpc>
+              <a:spcBef>
+                <a:spcPts val="600"/>
+              </a:spcBef>
+              <a:spcAft>
+                <a:spcPts val="800"/>
+              </a:spcAft>
+              <a:buNone/>
+            </a:pPr>
+            <a:r>
+              <a:rPr lang="en-US" sz="1800" b="1" dirty="0">
+                <a:solidFill>
+                  <a:srgbClr val="997929"/>
+                </a:solidFill>
+                <a:latin typeface="Times New Roman" pitchFamily="34" charset="0"/>
+                <a:ea typeface="Times New Roman" pitchFamily="34" charset="-122"/>
+                <a:cs typeface="Times New Roman" pitchFamily="34" charset="-120"/>
+              </a:rPr>
+              <a:t>Wrap-up (5 min)</a:t>
+            </a:r>
+            <a:endParaRPr lang="en-US" sz="1800" dirty="0"/>
+          </a:p>
+        </p:txBody>
+      </p:sp>
+      <p:sp>
+        <p:nvSpPr>
+          <p:cNvPr id="4" name="Text 2"/>
+          <p:cNvSpPr/>
+          <p:nvPr/>
+        </p:nvSpPr>
+        <p:spPr>
+          <a:xfrm>
+            <a:off x="634901" y="883593"/>
+            <a:ext cx="8102798" cy="281880"/>
+          </a:xfrm>
+          <a:prstGeom prst="rect">
+            <a:avLst/>
+          </a:prstGeom>
+          <a:noFill/>
+          <a:ln/>
+        </p:spPr>
+        <p:txBody>
+          <a:bodyPr wrap="square" lIns="0" tIns="0" rIns="0" bIns="0" rtlCol="0" anchor="t"/>
+          <a:lstStyle/>
+          <a:p>
+            <a:pPr algn="l" marL="342900" indent="-342900">
+              <a:lnSpc>
+                <a:spcPts val="1620"/>
+              </a:lnSpc>
+              <a:spcAft>
+                <a:spcPts val="300"/>
+              </a:spcAft>
+              <a:buSzPct val="100000"/>
+              <a:buChar char="•"/>
+            </a:pPr>
+            <a:r>
+              <a:rPr lang="en-US" sz="1200" dirty="0">
+                <a:solidFill>
+                  <a:srgbClr val="1A1A1A"/>
+                </a:solidFill>
+                <a:latin typeface="Georgia" pitchFamily="34" charset="0"/>
+                <a:ea typeface="Georgia" pitchFamily="34" charset="-122"/>
+                <a:cs typeface="Georgia" pitchFamily="34" charset="-120"/>
+              </a:rPr>
+              <a:t>Topic + thesis submitted at door.</a:t>
             </a:r>
             <a:endParaRPr lang="en-US" sz="1200" dirty="0"/>
           </a:p>
